--- a/youtube/tsugime-jissen/thumb_tsugime-jissen.pptx
+++ b/youtube/tsugime-jissen/thumb_tsugime-jissen.pptx
@@ -3178,181 +3178,14 @@
       </p:sp>
       <p:sp>
         <p:nvSpPr>
-          <p:cNvPr id="4" name="TextBox 3"/>
-          <p:cNvSpPr txBox="1"/>
+          <p:cNvPr id="4" name="Rounded Rectangle 3"/>
+          <p:cNvSpPr/>
           <p:nvPr/>
         </p:nvSpPr>
         <p:spPr>
           <a:xfrm>
-            <a:off x="1051560" y="1600200"/>
-            <a:ext cx="10424160" cy="1371600"/>
-          </a:xfrm>
-          <a:prstGeom prst="rect">
-            <a:avLst/>
-          </a:prstGeom>
-          <a:noFill/>
-        </p:spPr>
-        <p:txBody>
-          <a:bodyPr wrap="square" lIns="0" rIns="0" tIns="0" bIns="0">
-            <a:spAutoFit/>
-          </a:bodyPr>
-          <a:lstStyle/>
-          <a:p>
-            <a:pPr algn="l">
-              <a:lnSpc>
-                <a:spcPct val="120000"/>
-              </a:lnSpc>
-            </a:pPr>
-            <a:r>
-              <a:rPr sz="6600" b="1">
-                <a:solidFill>
-                  <a:srgbClr val="FFFFFF"/>
-                </a:solidFill>
-                <a:latin typeface="Hiragino Sans"/>
-                <a:ea typeface="Hiragino Sans"/>
-                <a:cs typeface="Hiragino Sans"/>
-              </a:rPr>
-              <a:t>物流の無駄は</a:t>
-            </a:r>
-          </a:p>
-        </p:txBody>
-      </p:sp>
-      <p:sp>
-        <p:nvSpPr>
-          <p:cNvPr id="5" name="TextBox 4"/>
-          <p:cNvSpPr txBox="1"/>
-          <p:nvPr/>
-        </p:nvSpPr>
-        <p:spPr>
-          <a:xfrm>
-            <a:off x="1051560" y="3063240"/>
-            <a:ext cx="10424160" cy="1371600"/>
-          </a:xfrm>
-          <a:prstGeom prst="rect">
-            <a:avLst/>
-          </a:prstGeom>
-          <a:noFill/>
-        </p:spPr>
-        <p:txBody>
-          <a:bodyPr wrap="square" lIns="0" rIns="0" tIns="0" bIns="0">
-            <a:spAutoFit/>
-          </a:bodyPr>
-          <a:lstStyle/>
-          <a:p>
-            <a:pPr algn="l">
-              <a:lnSpc>
-                <a:spcPct val="120000"/>
-              </a:lnSpc>
-            </a:pPr>
-            <a:r>
-              <a:rPr sz="6600" b="1">
-                <a:solidFill>
-                  <a:srgbClr val="D65C4C"/>
-                </a:solidFill>
-                <a:latin typeface="Hiragino Sans"/>
-                <a:ea typeface="Hiragino Sans"/>
-                <a:cs typeface="Hiragino Sans"/>
-              </a:rPr>
-              <a:t>「あいだ」にある</a:t>
-            </a:r>
-          </a:p>
-        </p:txBody>
-      </p:sp>
-      <p:sp>
-        <p:nvSpPr>
-          <p:cNvPr id="6" name="Rectangle 5"/>
-          <p:cNvSpPr/>
-          <p:nvPr/>
-        </p:nvSpPr>
-        <p:spPr>
-          <a:xfrm>
-            <a:off x="1078992" y="4709160"/>
-            <a:ext cx="2103120" cy="82296"/>
-          </a:xfrm>
-          <a:prstGeom prst="rect">
-            <a:avLst/>
-          </a:prstGeom>
-          <a:solidFill>
-            <a:srgbClr val="D65C4C"/>
-          </a:solidFill>
-          <a:ln>
-            <a:noFill/>
-          </a:ln>
-          <a:effectLst/>
-        </p:spPr>
-        <p:style>
-          <a:lnRef idx="1">
-            <a:schemeClr val="accent1"/>
-          </a:lnRef>
-          <a:fillRef idx="3">
-            <a:schemeClr val="accent1"/>
-          </a:fillRef>
-          <a:effectRef idx="2">
-            <a:schemeClr val="accent1"/>
-          </a:effectRef>
-          <a:fontRef idx="minor">
-            <a:schemeClr val="lt1"/>
-          </a:fontRef>
-        </p:style>
-        <p:txBody>
-          <a:bodyPr rtlCol="0" anchor="ctr"/>
-          <a:lstStyle/>
-          <a:p>
-            <a:pPr algn="ctr"/>
-          </a:p>
-        </p:txBody>
-      </p:sp>
-      <p:sp>
-        <p:nvSpPr>
-          <p:cNvPr id="7" name="TextBox 6"/>
-          <p:cNvSpPr txBox="1"/>
-          <p:nvPr/>
-        </p:nvSpPr>
-        <p:spPr>
-          <a:xfrm>
-            <a:off x="1051560" y="4983480"/>
-            <a:ext cx="10424160" cy="548640"/>
-          </a:xfrm>
-          <a:prstGeom prst="rect">
-            <a:avLst/>
-          </a:prstGeom>
-          <a:noFill/>
-        </p:spPr>
-        <p:txBody>
-          <a:bodyPr wrap="square" lIns="0" rIns="0" tIns="0" bIns="0">
-            <a:spAutoFit/>
-          </a:bodyPr>
-          <a:lstStyle/>
-          <a:p>
-            <a:pPr algn="l">
-              <a:lnSpc>
-                <a:spcPct val="120000"/>
-              </a:lnSpc>
-            </a:pPr>
-            <a:r>
-              <a:rPr sz="2200" b="0">
-                <a:solidFill>
-                  <a:srgbClr val="BDB6AF"/>
-                </a:solidFill>
-                <a:latin typeface="Hiragino Sans"/>
-                <a:ea typeface="Hiragino Sans"/>
-                <a:cs typeface="Hiragino Sans"/>
-              </a:rPr>
-              <a:t>継ぎ目論・実践編｜見つける・測る・持たせる</a:t>
-            </a:r>
-          </a:p>
-        </p:txBody>
-      </p:sp>
-      <p:sp>
-        <p:nvSpPr>
-          <p:cNvPr id="8" name="Rounded Rectangle 7"/>
-          <p:cNvSpPr/>
-          <p:nvPr/>
-        </p:nvSpPr>
-        <p:spPr>
-          <a:xfrm>
-            <a:off x="9646920" y="777240"/>
-            <a:ext cx="1737360" cy="566928"/>
+            <a:off x="1051560" y="868680"/>
+            <a:ext cx="1600200" cy="548640"/>
           </a:xfrm>
           <a:prstGeom prst="roundRect">
             <a:avLst>
@@ -3391,14 +3224,14 @@
       </p:sp>
       <p:sp>
         <p:nvSpPr>
-          <p:cNvPr id="9" name="TextBox 8"/>
+          <p:cNvPr id="5" name="TextBox 4"/>
           <p:cNvSpPr txBox="1"/>
           <p:nvPr/>
         </p:nvSpPr>
         <p:spPr>
           <a:xfrm>
-            <a:off x="9646920" y="914400"/>
-            <a:ext cx="1737360" cy="365760"/>
+            <a:off x="1051560" y="996696"/>
+            <a:ext cx="1600200" cy="365760"/>
           </a:xfrm>
           <a:prstGeom prst="rect">
             <a:avLst/>
@@ -3406,7 +3239,7 @@
           <a:noFill/>
         </p:spPr>
         <p:txBody>
-          <a:bodyPr wrap="square" lIns="0" rIns="0" tIns="0" bIns="0">
+          <a:bodyPr wrap="square" lIns="0" rIns="0" tIns="0" bIns="0" anchor="t">
             <a:spAutoFit/>
           </a:bodyPr>
           <a:lstStyle/>
@@ -3417,7 +3250,7 @@
               </a:lnSpc>
             </a:pPr>
             <a:r>
-              <a:rPr sz="2200" b="1">
+              <a:rPr sz="2100" b="1">
                 <a:solidFill>
                   <a:srgbClr val="FFFFFF"/>
                 </a:solidFill>
@@ -3432,14 +3265,14 @@
       </p:sp>
       <p:sp>
         <p:nvSpPr>
-          <p:cNvPr id="10" name="TextBox 9"/>
+          <p:cNvPr id="6" name="TextBox 5"/>
           <p:cNvSpPr txBox="1"/>
           <p:nvPr/>
         </p:nvSpPr>
         <p:spPr>
           <a:xfrm>
-            <a:off x="1051560" y="5806440"/>
-            <a:ext cx="7315200" cy="457200"/>
+            <a:off x="1051560" y="1874519"/>
+            <a:ext cx="5897880" cy="1188720"/>
           </a:xfrm>
           <a:prstGeom prst="rect">
             <a:avLst/>
@@ -3447,7 +3280,7 @@
           <a:noFill/>
         </p:spPr>
         <p:txBody>
-          <a:bodyPr wrap="square" lIns="0" rIns="0" tIns="0" bIns="0">
+          <a:bodyPr wrap="square" lIns="0" rIns="0" tIns="0" bIns="0" anchor="t">
             <a:spAutoFit/>
           </a:bodyPr>
           <a:lstStyle/>
@@ -3455,6 +3288,132 @@
             <a:pPr algn="l">
               <a:lnSpc>
                 <a:spcPct val="120000"/>
+              </a:lnSpc>
+            </a:pPr>
+            <a:r>
+              <a:rPr sz="5400" b="1">
+                <a:solidFill>
+                  <a:srgbClr val="FFFFFF"/>
+                </a:solidFill>
+                <a:latin typeface="Hiragino Sans"/>
+                <a:ea typeface="Hiragino Sans"/>
+                <a:cs typeface="Hiragino Sans"/>
+              </a:rPr>
+              <a:t>物流の無駄は</a:t>
+            </a:r>
+          </a:p>
+        </p:txBody>
+      </p:sp>
+      <p:sp>
+        <p:nvSpPr>
+          <p:cNvPr id="7" name="TextBox 6"/>
+          <p:cNvSpPr txBox="1"/>
+          <p:nvPr/>
+        </p:nvSpPr>
+        <p:spPr>
+          <a:xfrm>
+            <a:off x="1051560" y="3063240"/>
+            <a:ext cx="5897880" cy="1188720"/>
+          </a:xfrm>
+          <a:prstGeom prst="rect">
+            <a:avLst/>
+          </a:prstGeom>
+          <a:noFill/>
+        </p:spPr>
+        <p:txBody>
+          <a:bodyPr wrap="square" lIns="0" rIns="0" tIns="0" bIns="0" anchor="t">
+            <a:spAutoFit/>
+          </a:bodyPr>
+          <a:lstStyle/>
+          <a:p>
+            <a:pPr algn="l">
+              <a:lnSpc>
+                <a:spcPct val="120000"/>
+              </a:lnSpc>
+            </a:pPr>
+            <a:r>
+              <a:rPr sz="5400" b="1">
+                <a:solidFill>
+                  <a:srgbClr val="D65C4C"/>
+                </a:solidFill>
+                <a:latin typeface="Hiragino Sans"/>
+                <a:ea typeface="Hiragino Sans"/>
+                <a:cs typeface="Hiragino Sans"/>
+              </a:rPr>
+              <a:t>「あいだ」にある</a:t>
+            </a:r>
+          </a:p>
+        </p:txBody>
+      </p:sp>
+      <p:sp>
+        <p:nvSpPr>
+          <p:cNvPr id="8" name="Rectangle 7"/>
+          <p:cNvSpPr/>
+          <p:nvPr/>
+        </p:nvSpPr>
+        <p:spPr>
+          <a:xfrm>
+            <a:off x="1078992" y="4526280"/>
+            <a:ext cx="1920240" cy="82296"/>
+          </a:xfrm>
+          <a:prstGeom prst="rect">
+            <a:avLst/>
+          </a:prstGeom>
+          <a:solidFill>
+            <a:srgbClr val="D65C4C"/>
+          </a:solidFill>
+          <a:ln>
+            <a:noFill/>
+          </a:ln>
+          <a:effectLst/>
+        </p:spPr>
+        <p:style>
+          <a:lnRef idx="1">
+            <a:schemeClr val="accent1"/>
+          </a:lnRef>
+          <a:fillRef idx="3">
+            <a:schemeClr val="accent1"/>
+          </a:fillRef>
+          <a:effectRef idx="2">
+            <a:schemeClr val="accent1"/>
+          </a:effectRef>
+          <a:fontRef idx="minor">
+            <a:schemeClr val="lt1"/>
+          </a:fontRef>
+        </p:style>
+        <p:txBody>
+          <a:bodyPr rtlCol="0" anchor="ctr"/>
+          <a:lstStyle/>
+          <a:p>
+            <a:pPr algn="ctr"/>
+          </a:p>
+        </p:txBody>
+      </p:sp>
+      <p:sp>
+        <p:nvSpPr>
+          <p:cNvPr id="9" name="TextBox 8"/>
+          <p:cNvSpPr txBox="1"/>
+          <p:nvPr/>
+        </p:nvSpPr>
+        <p:spPr>
+          <a:xfrm>
+            <a:off x="1051560" y="4800600"/>
+            <a:ext cx="5897880" cy="914400"/>
+          </a:xfrm>
+          <a:prstGeom prst="rect">
+            <a:avLst/>
+          </a:prstGeom>
+          <a:noFill/>
+        </p:spPr>
+        <p:txBody>
+          <a:bodyPr wrap="square" lIns="0" rIns="0" tIns="0" bIns="0" anchor="t">
+            <a:spAutoFit/>
+          </a:bodyPr>
+          <a:lstStyle/>
+          <a:p>
+            <a:pPr algn="l">
+              <a:lnSpc>
+                <a:spcPct val="135000"/>
               </a:lnSpc>
             </a:pPr>
             <a:r>
@@ -3466,7 +3425,240 @@
                 <a:ea typeface="Hiragino Sans"/>
                 <a:cs typeface="Hiragino Sans"/>
               </a:rPr>
+              <a:t>継ぎ目論・実践編｜見つける・測る・持たせる</a:t>
+            </a:r>
+          </a:p>
+        </p:txBody>
+      </p:sp>
+      <p:sp>
+        <p:nvSpPr>
+          <p:cNvPr id="10" name="TextBox 9"/>
+          <p:cNvSpPr txBox="1"/>
+          <p:nvPr/>
+        </p:nvSpPr>
+        <p:spPr>
+          <a:xfrm>
+            <a:off x="1051560" y="5852160"/>
+            <a:ext cx="5897880" cy="457200"/>
+          </a:xfrm>
+          <a:prstGeom prst="rect">
+            <a:avLst/>
+          </a:prstGeom>
+          <a:noFill/>
+        </p:spPr>
+        <p:txBody>
+          <a:bodyPr wrap="square" lIns="0" rIns="0" tIns="0" bIns="0" anchor="t">
+            <a:spAutoFit/>
+          </a:bodyPr>
+          <a:lstStyle/>
+          <a:p>
+            <a:pPr algn="l">
+              <a:lnSpc>
+                <a:spcPct val="120000"/>
+              </a:lnSpc>
+            </a:pPr>
+            <a:r>
+              <a:rPr sz="1900" b="0">
+                <a:solidFill>
+                  <a:srgbClr val="BDB6AF"/>
+                </a:solidFill>
+                <a:latin typeface="Hiragino Sans"/>
+                <a:ea typeface="Hiragino Sans"/>
+                <a:cs typeface="Hiragino Sans"/>
+              </a:rPr>
               <a:t>物流現場ラボ ロジた</a:t>
+            </a:r>
+          </a:p>
+        </p:txBody>
+      </p:sp>
+      <p:sp>
+        <p:nvSpPr>
+          <p:cNvPr id="11" name="Rounded Rectangle 10"/>
+          <p:cNvSpPr/>
+          <p:nvPr/>
+        </p:nvSpPr>
+        <p:spPr>
+          <a:xfrm>
+            <a:off x="7360920" y="548640"/>
+            <a:ext cx="4343400" cy="5760720"/>
+          </a:xfrm>
+          <a:prstGeom prst="roundRect">
+            <a:avLst>
+              <a:gd name="adj" fmla="val 6000"/>
+            </a:avLst>
+          </a:prstGeom>
+          <a:solidFill>
+            <a:srgbClr val="2A2624"/>
+          </a:solidFill>
+          <a:ln>
+            <a:noFill/>
+          </a:ln>
+          <a:effectLst/>
+        </p:spPr>
+        <p:style>
+          <a:lnRef idx="1">
+            <a:schemeClr val="accent1"/>
+          </a:lnRef>
+          <a:fillRef idx="3">
+            <a:schemeClr val="accent1"/>
+          </a:fillRef>
+          <a:effectRef idx="2">
+            <a:schemeClr val="accent1"/>
+          </a:effectRef>
+          <a:fontRef idx="minor">
+            <a:schemeClr val="lt1"/>
+          </a:fontRef>
+        </p:style>
+        <p:txBody>
+          <a:bodyPr rtlCol="0" anchor="ctr"/>
+          <a:lstStyle/>
+          <a:p>
+            <a:pPr algn="ctr"/>
+          </a:p>
+        </p:txBody>
+      </p:sp>
+      <p:sp>
+        <p:nvSpPr>
+          <p:cNvPr id="12" name="Rectangle 11"/>
+          <p:cNvSpPr/>
+          <p:nvPr/>
+        </p:nvSpPr>
+        <p:spPr>
+          <a:xfrm>
+            <a:off x="7360920" y="548640"/>
+            <a:ext cx="4343400" cy="82296"/>
+          </a:xfrm>
+          <a:prstGeom prst="rect">
+            <a:avLst/>
+          </a:prstGeom>
+          <a:solidFill>
+            <a:srgbClr val="D65C4C"/>
+          </a:solidFill>
+          <a:ln>
+            <a:noFill/>
+          </a:ln>
+          <a:effectLst/>
+        </p:spPr>
+        <p:style>
+          <a:lnRef idx="1">
+            <a:schemeClr val="accent1"/>
+          </a:lnRef>
+          <a:fillRef idx="3">
+            <a:schemeClr val="accent1"/>
+          </a:fillRef>
+          <a:effectRef idx="2">
+            <a:schemeClr val="accent1"/>
+          </a:effectRef>
+          <a:fontRef idx="minor">
+            <a:schemeClr val="lt1"/>
+          </a:fontRef>
+        </p:style>
+        <p:txBody>
+          <a:bodyPr rtlCol="0" anchor="ctr"/>
+          <a:lstStyle/>
+          <a:p>
+            <a:pPr algn="ctr"/>
+          </a:p>
+        </p:txBody>
+      </p:sp>
+      <p:sp>
+        <p:nvSpPr>
+          <p:cNvPr id="13" name="Rounded Rectangle 12"/>
+          <p:cNvSpPr/>
+          <p:nvPr/>
+        </p:nvSpPr>
+        <p:spPr>
+          <a:xfrm>
+            <a:off x="7635240" y="822960"/>
+            <a:ext cx="3794760" cy="5212080"/>
+          </a:xfrm>
+          <a:prstGeom prst="roundRect">
+            <a:avLst>
+              <a:gd name="adj" fmla="val 5000"/>
+            </a:avLst>
+          </a:prstGeom>
+          <a:noFill/>
+          <a:ln w="25400">
+            <a:solidFill>
+              <a:srgbClr val="6E6760"/>
+            </a:solidFill>
+            <a:prstDash val="dash"/>
+          </a:ln>
+          <a:effectLst/>
+        </p:spPr>
+        <p:style>
+          <a:lnRef idx="1">
+            <a:schemeClr val="accent1"/>
+          </a:lnRef>
+          <a:fillRef idx="3">
+            <a:schemeClr val="accent1"/>
+          </a:fillRef>
+          <a:effectRef idx="2">
+            <a:schemeClr val="accent1"/>
+          </a:effectRef>
+          <a:fontRef idx="minor">
+            <a:schemeClr val="lt1"/>
+          </a:fontRef>
+        </p:style>
+        <p:txBody>
+          <a:bodyPr rtlCol="0" anchor="ctr"/>
+          <a:lstStyle/>
+          <a:p>
+            <a:pPr algn="ctr"/>
+          </a:p>
+        </p:txBody>
+      </p:sp>
+      <p:sp>
+        <p:nvSpPr>
+          <p:cNvPr id="14" name="TextBox 13"/>
+          <p:cNvSpPr txBox="1"/>
+          <p:nvPr/>
+        </p:nvSpPr>
+        <p:spPr>
+          <a:xfrm>
+            <a:off x="7360920" y="2926080"/>
+            <a:ext cx="4343400" cy="1005840"/>
+          </a:xfrm>
+          <a:prstGeom prst="rect">
+            <a:avLst/>
+          </a:prstGeom>
+          <a:noFill/>
+        </p:spPr>
+        <p:txBody>
+          <a:bodyPr wrap="square" lIns="0" rIns="0" tIns="0" bIns="0" anchor="t">
+            <a:spAutoFit/>
+          </a:bodyPr>
+          <a:lstStyle/>
+          <a:p>
+            <a:pPr algn="ctr">
+              <a:lnSpc>
+                <a:spcPct val="150000"/>
+              </a:lnSpc>
+            </a:pPr>
+            <a:r>
+              <a:rPr sz="2000" b="0">
+                <a:solidFill>
+                  <a:srgbClr val="BDB6AF"/>
+                </a:solidFill>
+                <a:latin typeface="Hiragino Sans"/>
+                <a:ea typeface="Hiragino Sans"/>
+                <a:cs typeface="Hiragino Sans"/>
+              </a:rPr>
+              <a:t>アバター画像</a:t>
+            </a:r>
+          </a:p>
+          <a:p>
+            <a:pPr algn="ctr"/>
+            <a:r>
+              <a:rPr sz="1400">
+                <a:solidFill>
+                  <a:srgbClr val="BDB6AF"/>
+                </a:solidFill>
+                <a:latin typeface="Hiragino Sans"/>
+                <a:ea typeface="Hiragino Sans"/>
+                <a:cs typeface="Hiragino Sans"/>
+              </a:rPr>
+              <a:t>thumb.json の avatar にパスを指定</a:t>
             </a:r>
           </a:p>
         </p:txBody>
